--- a/08-AI_CAMPUS-main/python-day3/Python_Day3.pptx
+++ b/08-AI_CAMPUS-main/python-day3/Python_Day3.pptx
@@ -3337,7 +3337,7 @@
                 <a:ea typeface="Malgun Gothic" pitchFamily="34" charset="-122"/>
                 <a:cs typeface="Malgun Gothic" pitchFamily="34" charset="-120"/>
               </a:rPr>
-              <a:t>강사: 박웅근 · 김정인</a:t>
+              <a:t>강사: 이몽룡 · 홍길동</a:t>
             </a:r>
             <a:endParaRPr lang="en-US" sz="1300" dirty="0"/>
           </a:p>
@@ -3778,7 +3778,7 @@
                 <a:latin typeface="Malgun Gothic" pitchFamily="34" charset="0"/>
                 <a:ea typeface="Malgun Gothic" pitchFamily="34" charset="-122"/>
                 <a:cs typeface="Malgun Gothic" pitchFamily="34" charset="-120"/>
-                <a:hlinkClick r:id="rId3" tooltip="https://imguru-mooc.github.io/AI_CAMPUS/python-day3/anim/index.html">
+                <a:hlinkClick r:id="rId3" tooltip="https://devops0906.github.io/AI_CAMPUS/python-day3/anim/index.html">
                   <a:extLst>
                     <a:ext uri="{A12FA001-AC4F-418D-AE19-62706E023703}">
                       <ahyp:hlinkClr xmlns:ahyp="http://schemas.microsoft.com/office/drawing/2018/hyperlinkcolor" val="tx"/>
@@ -6265,7 +6265,7 @@
                 <a:latin typeface="Malgun Gothic" pitchFamily="34" charset="0"/>
                 <a:ea typeface="Malgun Gothic" pitchFamily="34" charset="-122"/>
                 <a:cs typeface="Malgun Gothic" pitchFamily="34" charset="-120"/>
-                <a:hlinkClick r:id="rId3" tooltip="https://imguru-mooc.github.io/AI_CAMPUS/python-day3/anim/D3-3_%ED%8C%8C%EC%9D%BC_%EC%9E%85%EC%B6%9C%EB%A0%A5_%ED%9D%90%EB%A6%84.html">
+                <a:hlinkClick r:id="rId3" tooltip="https://devops0906.github.io/AI_CAMPUS/python-day3/anim/D3-3_%ED%8C%8C%EC%9D%BC_%EC%9E%85%EC%B6%9C%EB%A0%A5_%ED%9D%90%EB%A6%84.html">
                   <a:extLst>
                     <a:ext uri="{A12FA001-AC4F-418D-AE19-62706E023703}">
                       <ahyp:hlinkClr xmlns:ahyp="http://schemas.microsoft.com/office/drawing/2018/hyperlinkcolor" val="tx"/>
@@ -8735,7 +8735,7 @@
                 <a:latin typeface="Malgun Gothic" pitchFamily="34" charset="0"/>
                 <a:ea typeface="Malgun Gothic" pitchFamily="34" charset="-122"/>
                 <a:cs typeface="Malgun Gothic" pitchFamily="34" charset="-120"/>
-                <a:hlinkClick r:id="rId3" tooltip="https://imguru-mooc.github.io/AI_CAMPUS/python-day3/anim/D3-4_JSON_%EC%A7%81%EB%A0%AC%ED%99%94_%EC%99%95%EB%B3%B5.html">
+                <a:hlinkClick r:id="rId3" tooltip="https://devops0906.github.io/AI_CAMPUS/python-day3/anim/D3-4_JSON_%EC%A7%81%EB%A0%AC%ED%99%94_%EC%99%95%EB%B3%B5.html">
                   <a:extLst>
                     <a:ext uri="{A12FA001-AC4F-418D-AE19-62706E023703}">
                       <ahyp:hlinkClr xmlns:ahyp="http://schemas.microsoft.com/office/drawing/2018/hyperlinkcolor" val="tx"/>
@@ -11205,7 +11205,7 @@
                 <a:latin typeface="Malgun Gothic" pitchFamily="34" charset="0"/>
                 <a:ea typeface="Malgun Gothic" pitchFamily="34" charset="-122"/>
                 <a:cs typeface="Malgun Gothic" pitchFamily="34" charset="-120"/>
-                <a:hlinkClick r:id="rId3" tooltip="https://imguru-mooc.github.io/AI_CAMPUS/python-day3/anim/index.html">
+                <a:hlinkClick r:id="rId3" tooltip="https://devops0906.github.io/AI_CAMPUS/python-day3/anim/index.html">
                   <a:extLst>
                     <a:ext uri="{A12FA001-AC4F-418D-AE19-62706E023703}">
                       <ahyp:hlinkClr xmlns:ahyp="http://schemas.microsoft.com/office/drawing/2018/hyperlinkcolor" val="tx"/>
@@ -13692,7 +13692,7 @@
                 <a:latin typeface="Malgun Gothic" pitchFamily="34" charset="0"/>
                 <a:ea typeface="Malgun Gothic" pitchFamily="34" charset="-122"/>
                 <a:cs typeface="Malgun Gothic" pitchFamily="34" charset="-120"/>
-                <a:hlinkClick r:id="rId3" tooltip="https://imguru-mooc.github.io/AI_CAMPUS/python-day3/anim/index.html">
+                <a:hlinkClick r:id="rId3" tooltip="https://devops0906.github.io/AI_CAMPUS/python-day3/anim/index.html">
                   <a:extLst>
                     <a:ext uri="{A12FA001-AC4F-418D-AE19-62706E023703}">
                       <ahyp:hlinkClr xmlns:ahyp="http://schemas.microsoft.com/office/drawing/2018/hyperlinkcolor" val="tx"/>
@@ -24609,7 +24609,7 @@
       <p:sp>
         <p:nvSpPr>
           <p:cNvPr id="7" name="Text 4">
-            <a:hlinkClick r:id="rId3" tooltip="https://imguru-mooc.github.io/AI_CAMPUS/python-day3/anim/index.html"/>
+            <a:hlinkClick r:id="rId3" tooltip="https://devops0906.github.io/AI_CAMPUS/python-day3/anim/index.html"/>
           </p:cNvPr>
           <p:cNvSpPr txBox="1"/>
           <p:nvPr/>
@@ -24640,7 +24640,7 @@
                 <a:latin typeface="Courier New" pitchFamily="34" charset="0"/>
                 <a:ea typeface="Courier New" pitchFamily="34" charset="-122"/>
                 <a:cs typeface="Courier New" pitchFamily="34" charset="-120"/>
-                <a:hlinkClick r:id="rId3" tooltip="https://imguru-mooc.github.io/AI_CAMPUS/python-day3/anim/index.html">
+                <a:hlinkClick r:id="rId3" tooltip="https://devops0906.github.io/AI_CAMPUS/python-day3/anim/index.html">
                   <a:extLst>
                     <a:ext uri="{A12FA001-AC4F-418D-AE19-62706E023703}">
                       <ahyp:hlinkClr xmlns:ahyp="http://schemas.microsoft.com/office/drawing/2018/hyperlinkcolor" val="tx"/>
@@ -25054,7 +25054,7 @@
       <p:sp>
         <p:nvSpPr>
           <p:cNvPr id="15" name="Text 12">
-            <a:hlinkClick r:id="rId4" tooltip="https://imguru-mooc.github.io/AI_CAMPUS/python-day3/anim/worksheet.html"/>
+            <a:hlinkClick r:id="rId4" tooltip="https://devops0906.github.io/AI_CAMPUS/python-day3/anim/worksheet.html"/>
           </p:cNvPr>
           <p:cNvSpPr txBox="1"/>
           <p:nvPr/>
@@ -25085,7 +25085,7 @@
                 <a:latin typeface="Courier New" pitchFamily="34" charset="0"/>
                 <a:ea typeface="Courier New" pitchFamily="34" charset="-122"/>
                 <a:cs typeface="Courier New" pitchFamily="34" charset="-120"/>
-                <a:hlinkClick r:id="rId4" tooltip="https://imguru-mooc.github.io/AI_CAMPUS/python-day3/anim/worksheet.html">
+                <a:hlinkClick r:id="rId4" tooltip="https://devops0906.github.io/AI_CAMPUS/python-day3/anim/worksheet.html">
                   <a:extLst>
                     <a:ext uri="{A12FA001-AC4F-418D-AE19-62706E023703}">
                       <ahyp:hlinkClr xmlns:ahyp="http://schemas.microsoft.com/office/drawing/2018/hyperlinkcolor" val="tx"/>
@@ -25870,7 +25870,7 @@
       <p:sp>
         <p:nvSpPr>
           <p:cNvPr id="7" name="Text 4">
-            <a:hlinkClick r:id="rId3" tooltip="https://imguru-mooc.github.io/AI_CAMPUS/python-day3/anim/D3-1_%ED%81%B4%EB%9E%98%EC%8A%A4_%EC%9D%B8%EC%8A%A4%ED%84%B4%EC%8A%A4_%EB%AA%A8%EB%8D%B8.html"/>
+            <a:hlinkClick r:id="rId3" tooltip="https://devops0906.github.io/AI_CAMPUS/python-day3/anim/D3-1_%ED%81%B4%EB%9E%98%EC%8A%A4_%EC%9D%B8%EC%8A%A4%ED%84%B4%EC%8A%A4_%EB%AA%A8%EB%8D%B8.html"/>
           </p:cNvPr>
           <p:cNvSpPr txBox="1"/>
           <p:nvPr/>
@@ -25901,7 +25901,7 @@
                 <a:latin typeface="Malgun Gothic" pitchFamily="34" charset="0"/>
                 <a:ea typeface="Malgun Gothic" pitchFamily="34" charset="-122"/>
                 <a:cs typeface="Malgun Gothic" pitchFamily="34" charset="-120"/>
-                <a:hlinkClick r:id="rId3" tooltip="https://imguru-mooc.github.io/AI_CAMPUS/python-day3/anim/D3-1_%ED%81%B4%EB%9E%98%EC%8A%A4_%EC%9D%B8%EC%8A%A4%ED%84%B4%EC%8A%A4_%EB%AA%A8%EB%8D%B8.html">
+                <a:hlinkClick r:id="rId3" tooltip="https://devops0906.github.io/AI_CAMPUS/python-day3/anim/D3-1_%ED%81%B4%EB%9E%98%EC%8A%A4_%EC%9D%B8%EC%8A%A4%ED%84%B4%EC%8A%A4_%EB%AA%A8%EB%8D%B8.html">
                   <a:extLst>
                     <a:ext uri="{A12FA001-AC4F-418D-AE19-62706E023703}">
                       <ahyp:hlinkClr xmlns:ahyp="http://schemas.microsoft.com/office/drawing/2018/hyperlinkcolor" val="tx"/>
@@ -26069,7 +26069,7 @@
       <p:sp>
         <p:nvSpPr>
           <p:cNvPr id="12" name="Text 9">
-            <a:hlinkClick r:id="rId4" tooltip="https://imguru-mooc.github.io/AI_CAMPUS/python-day3/anim/D3-2_%EC%83%81%EC%86%8D_%EB%A9%94%EC%84%9C%EB%93%9C%ED%83%90%EC%83%89.html"/>
+            <a:hlinkClick r:id="rId4" tooltip="https://devops0906.github.io/AI_CAMPUS/python-day3/anim/D3-2_%EC%83%81%EC%86%8D_%EB%A9%94%EC%84%9C%EB%93%9C%ED%83%90%EC%83%89.html"/>
           </p:cNvPr>
           <p:cNvSpPr txBox="1"/>
           <p:nvPr/>
@@ -26100,7 +26100,7 @@
                 <a:latin typeface="Malgun Gothic" pitchFamily="34" charset="0"/>
                 <a:ea typeface="Malgun Gothic" pitchFamily="34" charset="-122"/>
                 <a:cs typeface="Malgun Gothic" pitchFamily="34" charset="-120"/>
-                <a:hlinkClick r:id="rId4" tooltip="https://imguru-mooc.github.io/AI_CAMPUS/python-day3/anim/D3-2_%EC%83%81%EC%86%8D_%EB%A9%94%EC%84%9C%EB%93%9C%ED%83%90%EC%83%89.html">
+                <a:hlinkClick r:id="rId4" tooltip="https://devops0906.github.io/AI_CAMPUS/python-day3/anim/D3-2_%EC%83%81%EC%86%8D_%EB%A9%94%EC%84%9C%EB%93%9C%ED%83%90%EC%83%89.html">
                   <a:extLst>
                     <a:ext uri="{A12FA001-AC4F-418D-AE19-62706E023703}">
                       <ahyp:hlinkClr xmlns:ahyp="http://schemas.microsoft.com/office/drawing/2018/hyperlinkcolor" val="tx"/>
@@ -26268,7 +26268,7 @@
       <p:sp>
         <p:nvSpPr>
           <p:cNvPr id="17" name="Text 14">
-            <a:hlinkClick r:id="rId5" tooltip="https://imguru-mooc.github.io/AI_CAMPUS/python-day3/anim/D3-3_%ED%8C%8C%EC%9D%BC_%EC%9E%85%EC%B6%9C%EB%A0%A5_%ED%9D%90%EB%A6%84.html"/>
+            <a:hlinkClick r:id="rId5" tooltip="https://devops0906.github.io/AI_CAMPUS/python-day3/anim/D3-3_%ED%8C%8C%EC%9D%BC_%EC%9E%85%EC%B6%9C%EB%A0%A5_%ED%9D%90%EB%A6%84.html"/>
           </p:cNvPr>
           <p:cNvSpPr txBox="1"/>
           <p:nvPr/>
@@ -26299,7 +26299,7 @@
                 <a:latin typeface="Malgun Gothic" pitchFamily="34" charset="0"/>
                 <a:ea typeface="Malgun Gothic" pitchFamily="34" charset="-122"/>
                 <a:cs typeface="Malgun Gothic" pitchFamily="34" charset="-120"/>
-                <a:hlinkClick r:id="rId5" tooltip="https://imguru-mooc.github.io/AI_CAMPUS/python-day3/anim/D3-3_%ED%8C%8C%EC%9D%BC_%EC%9E%85%EC%B6%9C%EB%A0%A5_%ED%9D%90%EB%A6%84.html">
+                <a:hlinkClick r:id="rId5" tooltip="https://devops0906.github.io/AI_CAMPUS/python-day3/anim/D3-3_%ED%8C%8C%EC%9D%BC_%EC%9E%85%EC%B6%9C%EB%A0%A5_%ED%9D%90%EB%A6%84.html">
                   <a:extLst>
                     <a:ext uri="{A12FA001-AC4F-418D-AE19-62706E023703}">
                       <ahyp:hlinkClr xmlns:ahyp="http://schemas.microsoft.com/office/drawing/2018/hyperlinkcolor" val="tx"/>
@@ -26467,7 +26467,7 @@
       <p:sp>
         <p:nvSpPr>
           <p:cNvPr id="22" name="Text 19">
-            <a:hlinkClick r:id="rId6" tooltip="https://imguru-mooc.github.io/AI_CAMPUS/python-day3/anim/D3-4_JSON_%EC%A7%81%EB%A0%AC%ED%99%94_%EC%99%95%EB%B3%B5.html"/>
+            <a:hlinkClick r:id="rId6" tooltip="https://devops0906.github.io/AI_CAMPUS/python-day3/anim/D3-4_JSON_%EC%A7%81%EB%A0%AC%ED%99%94_%EC%99%95%EB%B3%B5.html"/>
           </p:cNvPr>
           <p:cNvSpPr txBox="1"/>
           <p:nvPr/>
@@ -26498,7 +26498,7 @@
                 <a:latin typeface="Malgun Gothic" pitchFamily="34" charset="0"/>
                 <a:ea typeface="Malgun Gothic" pitchFamily="34" charset="-122"/>
                 <a:cs typeface="Malgun Gothic" pitchFamily="34" charset="-120"/>
-                <a:hlinkClick r:id="rId6" tooltip="https://imguru-mooc.github.io/AI_CAMPUS/python-day3/anim/D3-4_JSON_%EC%A7%81%EB%A0%AC%ED%99%94_%EC%99%95%EB%B3%B5.html">
+                <a:hlinkClick r:id="rId6" tooltip="https://devops0906.github.io/AI_CAMPUS/python-day3/anim/D3-4_JSON_%EC%A7%81%EB%A0%AC%ED%99%94_%EC%99%95%EB%B3%B5.html">
                   <a:extLst>
                     <a:ext uri="{A12FA001-AC4F-418D-AE19-62706E023703}">
                       <ahyp:hlinkClr xmlns:ahyp="http://schemas.microsoft.com/office/drawing/2018/hyperlinkcolor" val="tx"/>
@@ -26666,7 +26666,7 @@
       <p:sp>
         <p:nvSpPr>
           <p:cNvPr id="27" name="Text 24">
-            <a:hlinkClick r:id="rId7" tooltip="https://imguru-mooc.github.io/AI_CAMPUS/python-day3/anim/D3-5_%EC%8B%9C%EB%A6%AC%EC%96%BC_%EC%8A%A4%ED%8A%B8%EB%A6%BC.html"/>
+            <a:hlinkClick r:id="rId7" tooltip="https://devops0906.github.io/AI_CAMPUS/python-day3/anim/D3-5_%EC%8B%9C%EB%A6%AC%EC%96%BC_%EC%8A%A4%ED%8A%B8%EB%A6%BC.html"/>
           </p:cNvPr>
           <p:cNvSpPr txBox="1"/>
           <p:nvPr/>
@@ -26697,7 +26697,7 @@
                 <a:latin typeface="Malgun Gothic" pitchFamily="34" charset="0"/>
                 <a:ea typeface="Malgun Gothic" pitchFamily="34" charset="-122"/>
                 <a:cs typeface="Malgun Gothic" pitchFamily="34" charset="-120"/>
-                <a:hlinkClick r:id="rId7" tooltip="https://imguru-mooc.github.io/AI_CAMPUS/python-day3/anim/D3-5_%EC%8B%9C%EB%A6%AC%EC%96%BC_%EC%8A%A4%ED%8A%B8%EB%A6%BC.html">
+                <a:hlinkClick r:id="rId7" tooltip="https://devops0906.github.io/AI_CAMPUS/python-day3/anim/D3-5_%EC%8B%9C%EB%A6%AC%EC%96%BC_%EC%8A%A4%ED%8A%B8%EB%A6%BC.html">
                   <a:extLst>
                     <a:ext uri="{A12FA001-AC4F-418D-AE19-62706E023703}">
                       <ahyp:hlinkClr xmlns:ahyp="http://schemas.microsoft.com/office/drawing/2018/hyperlinkcolor" val="tx"/>
@@ -26865,7 +26865,7 @@
       <p:sp>
         <p:nvSpPr>
           <p:cNvPr id="32" name="Text 29">
-            <a:hlinkClick r:id="rId8" tooltip="https://imguru-mooc.github.io/AI_CAMPUS/python-day1/anim/03_%EC%A0%9C%EC%96%B4%ED%9D%90%EB%A6%84_%EC%B6%94%EC%A0%81%EA%B8%B0.html"/>
+            <a:hlinkClick r:id="rId8" tooltip="https://devops0906.github.io/AI_CAMPUS/python-day1/anim/03_%EC%A0%9C%EC%96%B4%ED%9D%90%EB%A6%84_%EC%B6%94%EC%A0%81%EA%B8%B0.html"/>
           </p:cNvPr>
           <p:cNvSpPr txBox="1"/>
           <p:nvPr/>
@@ -26896,7 +26896,7 @@
                 <a:latin typeface="Malgun Gothic" pitchFamily="34" charset="0"/>
                 <a:ea typeface="Malgun Gothic" pitchFamily="34" charset="-122"/>
                 <a:cs typeface="Malgun Gothic" pitchFamily="34" charset="-120"/>
-                <a:hlinkClick r:id="rId8" tooltip="https://imguru-mooc.github.io/AI_CAMPUS/python-day1/anim/03_%EC%A0%9C%EC%96%B4%ED%9D%90%EB%A6%84_%EC%B6%94%EC%A0%81%EA%B8%B0.html">
+                <a:hlinkClick r:id="rId8" tooltip="https://devops0906.github.io/AI_CAMPUS/python-day1/anim/03_%EC%A0%9C%EC%96%B4%ED%9D%90%EB%A6%84_%EC%B6%94%EC%A0%81%EA%B8%B0.html">
                   <a:extLst>
                     <a:ext uri="{A12FA001-AC4F-418D-AE19-62706E023703}">
                       <ahyp:hlinkClr xmlns:ahyp="http://schemas.microsoft.com/office/drawing/2018/hyperlinkcolor" val="tx"/>
@@ -27064,7 +27064,7 @@
       <p:sp>
         <p:nvSpPr>
           <p:cNvPr id="37" name="Text 34">
-            <a:hlinkClick r:id="rId9" tooltip="https://imguru-mooc.github.io/AI_CAMPUS/python-day1/anim/04_%EB%AC%B8%EC%9E%90%EC%97%B4_%ED%8C%8C%EC%8B%B1_%ED%8C%8C%EC%9D%B4%ED%94%84%EB%9D%BC%EC%9D%B8.html"/>
+            <a:hlinkClick r:id="rId9" tooltip="https://devops0906.github.io/AI_CAMPUS/python-day1/anim/04_%EB%AC%B8%EC%9E%90%EC%97%B4_%ED%8C%8C%EC%8B%B1_%ED%8C%8C%EC%9D%B4%ED%94%84%EB%9D%BC%EC%9D%B8.html"/>
           </p:cNvPr>
           <p:cNvSpPr txBox="1"/>
           <p:nvPr/>
@@ -27095,7 +27095,7 @@
                 <a:latin typeface="Malgun Gothic" pitchFamily="34" charset="0"/>
                 <a:ea typeface="Malgun Gothic" pitchFamily="34" charset="-122"/>
                 <a:cs typeface="Malgun Gothic" pitchFamily="34" charset="-120"/>
-                <a:hlinkClick r:id="rId9" tooltip="https://imguru-mooc.github.io/AI_CAMPUS/python-day1/anim/04_%EB%AC%B8%EC%9E%90%EC%97%B4_%ED%8C%8C%EC%8B%B1_%ED%8C%8C%EC%9D%B4%ED%94%84%EB%9D%BC%EC%9D%B8.html">
+                <a:hlinkClick r:id="rId9" tooltip="https://devops0906.github.io/AI_CAMPUS/python-day1/anim/04_%EB%AC%B8%EC%9E%90%EC%97%B4_%ED%8C%8C%EC%8B%B1_%ED%8C%8C%EC%9D%B4%ED%94%84%EB%9D%BC%EC%9D%B8.html">
                   <a:extLst>
                     <a:ext uri="{A12FA001-AC4F-418D-AE19-62706E023703}">
                       <ahyp:hlinkClr xmlns:ahyp="http://schemas.microsoft.com/office/drawing/2018/hyperlinkcolor" val="tx"/>
@@ -27263,7 +27263,7 @@
       <p:sp>
         <p:nvSpPr>
           <p:cNvPr id="42" name="Text 39">
-            <a:hlinkClick r:id="rId10" tooltip="https://imguru-mooc.github.io/AI_CAMPUS/python-day2/anim/D2-5_%EC%A4%91%EC%B2%A9%EC%9E%90%EB%A3%8C%EA%B5%AC%EC%A1%B0_%ED%8A%B8%EB%A6%AC%EB%B7%B0%EC%96%B4.html"/>
+            <a:hlinkClick r:id="rId10" tooltip="https://devops0906.github.io/AI_CAMPUS/python-day2/anim/D2-5_%EC%A4%91%EC%B2%A9%EC%9E%90%EB%A3%8C%EA%B5%AC%EC%A1%B0_%ED%8A%B8%EB%A6%AC%EB%B7%B0%EC%96%B4.html"/>
           </p:cNvPr>
           <p:cNvSpPr txBox="1"/>
           <p:nvPr/>
@@ -27294,7 +27294,7 @@
                 <a:latin typeface="Malgun Gothic" pitchFamily="34" charset="0"/>
                 <a:ea typeface="Malgun Gothic" pitchFamily="34" charset="-122"/>
                 <a:cs typeface="Malgun Gothic" pitchFamily="34" charset="-120"/>
-                <a:hlinkClick r:id="rId10" tooltip="https://imguru-mooc.github.io/AI_CAMPUS/python-day2/anim/D2-5_%EC%A4%91%EC%B2%A9%EC%9E%90%EB%A3%8C%EA%B5%AC%EC%A1%B0_%ED%8A%B8%EB%A6%AC%EB%B7%B0%EC%96%B4.html">
+                <a:hlinkClick r:id="rId10" tooltip="https://devops0906.github.io/AI_CAMPUS/python-day2/anim/D2-5_%EC%A4%91%EC%B2%A9%EC%9E%90%EB%A3%8C%EA%B5%AC%EC%A1%B0_%ED%8A%B8%EB%A6%AC%EB%B7%B0%EC%96%B4.html">
                   <a:extLst>
                     <a:ext uri="{A12FA001-AC4F-418D-AE19-62706E023703}">
                       <ahyp:hlinkClr xmlns:ahyp="http://schemas.microsoft.com/office/drawing/2018/hyperlinkcolor" val="tx"/>
@@ -27462,7 +27462,7 @@
       <p:sp>
         <p:nvSpPr>
           <p:cNvPr id="47" name="Text 44">
-            <a:hlinkClick r:id="rId11" tooltip="https://imguru-mooc.github.io/AI_CAMPUS/python-day2/anim/D2-6_%EC%9E%90%EB%A3%8C%EA%B5%AC%EC%A1%B0_%EA%B2%B0%EC%A0%95%ED%8A%B8%EB%A6%AC.html"/>
+            <a:hlinkClick r:id="rId11" tooltip="https://devops0906.github.io/AI_CAMPUS/python-day2/anim/D2-6_%EC%9E%90%EB%A3%8C%EA%B5%AC%EC%A1%B0_%EA%B2%B0%EC%A0%95%ED%8A%B8%EB%A6%AC.html"/>
           </p:cNvPr>
           <p:cNvSpPr txBox="1"/>
           <p:nvPr/>
@@ -27493,7 +27493,7 @@
                 <a:latin typeface="Malgun Gothic" pitchFamily="34" charset="0"/>
                 <a:ea typeface="Malgun Gothic" pitchFamily="34" charset="-122"/>
                 <a:cs typeface="Malgun Gothic" pitchFamily="34" charset="-120"/>
-                <a:hlinkClick r:id="rId11" tooltip="https://imguru-mooc.github.io/AI_CAMPUS/python-day2/anim/D2-6_%EC%9E%90%EB%A3%8C%EA%B5%AC%EC%A1%B0_%EA%B2%B0%EC%A0%95%ED%8A%B8%EB%A6%AC.html">
+                <a:hlinkClick r:id="rId11" tooltip="https://devops0906.github.io/AI_CAMPUS/python-day2/anim/D2-6_%EC%9E%90%EB%A3%8C%EA%B5%AC%EC%A1%B0_%EA%B2%B0%EC%A0%95%ED%8A%B8%EB%A6%AC.html">
                   <a:extLst>
                     <a:ext uri="{A12FA001-AC4F-418D-AE19-62706E023703}">
                       <ahyp:hlinkClr xmlns:ahyp="http://schemas.microsoft.com/office/drawing/2018/hyperlinkcolor" val="tx"/>
@@ -27636,7 +27636,7 @@
                   </a:extLst>
                 </a:hlinkClick>
               </a:rPr>
-              <a:t>https://imguru-mooc.github.io/AI_CAMPUS/python-day3/anim/index.html</a:t>
+              <a:t>https://devops0906.github.io/AI_CAMPUS/python-day3/anim/index.html</a:t>
             </a:r>
             <a:endParaRPr lang="en-US" sz="1050" dirty="0"/>
           </a:p>
@@ -29019,7 +29019,7 @@
                   </a:extLst>
                 </a:hlinkClick>
               </a:rPr>
-              <a:t>https://imguru-mooc.github.io/AI_CAMPUS/python-day3/anim/worksheet.html</a:t>
+              <a:t>https://devops0906.github.io/AI_CAMPUS/python-day3/anim/worksheet.html</a:t>
             </a:r>
             <a:endParaRPr lang="en-US" sz="900" dirty="0"/>
           </a:p>
@@ -29400,7 +29400,7 @@
                 <a:ea typeface="Malgun Gothic" pitchFamily="34" charset="-122"/>
                 <a:cs typeface="Malgun Gothic" pitchFamily="34" charset="-120"/>
               </a:rPr>
-              <a:t>온라인 자료 링크</a:t>
+              <a:t>레포 위치 링크</a:t>
             </a:r>
             <a:endParaRPr lang="en-US" sz="3000" dirty="0"/>
           </a:p>
@@ -29560,7 +29560,7 @@
                   </a:extLst>
                 </a:hlinkClick>
               </a:rPr>
-              <a:t>https://imguru-mooc.github.io/AI_CAMPUS/python-day3/anim/</a:t>
+              <a:t>https://devops0906.github.io/AI_CAMPUS/python-day3/anim/</a:t>
             </a:r>
             <a:endParaRPr lang="en-US" sz="2000" dirty="0"/>
           </a:p>
@@ -30788,7 +30788,7 @@
                 <a:latin typeface="Malgun Gothic" pitchFamily="34" charset="0"/>
                 <a:ea typeface="Malgun Gothic" pitchFamily="34" charset="-122"/>
                 <a:cs typeface="Malgun Gothic" pitchFamily="34" charset="-120"/>
-                <a:hlinkClick r:id="rId3" tooltip="https://imguru-mooc.github.io/AI_CAMPUS/python-day3/anim/D3-1_%ED%81%B4%EB%9E%98%EC%8A%A4_%EC%9D%B8%EC%8A%A4%ED%84%B4%EC%8A%A4_%EB%AA%A8%EB%8D%B8.html">
+                <a:hlinkClick r:id="rId3" tooltip="https://devops0906.github.io/AI_CAMPUS/python-day3/anim/D3-1_%ED%81%B4%EB%9E%98%EC%8A%A4_%EC%9D%B8%EC%8A%A4%ED%84%B4%EC%8A%A4_%EB%AA%A8%EB%8D%B8.html">
                   <a:extLst>
                     <a:ext uri="{A12FA001-AC4F-418D-AE19-62706E023703}">
                       <ahyp:hlinkClr xmlns:ahyp="http://schemas.microsoft.com/office/drawing/2018/hyperlinkcolor" val="tx"/>
